--- a/fixtures/rules/pack-voice-field.pptx
+++ b/fixtures/rules/pack-voice-field.pptx
@@ -847,7 +847,7 @@
           <a:noFill/>
         </p:spPr>
         <p:txBody>
-          <a:bodyPr vert="horz" wrap="square" lIns="0" tIns="0" rIns="0" bIns="0" rtlCol="0" anchor="t">
+          <a:bodyPr vert="horz" wrap="square" lIns="0" tIns="0" rIns="0" bIns="78336" rtlCol="0" anchor="b">
             <a:noAutofit/>
           </a:bodyPr>
           <a:lstStyle>
@@ -1346,7 +1346,7 @@
           <a:noFill/>
         </p:spPr>
         <p:txBody>
-          <a:bodyPr vert="horz" wrap="square" lIns="0" tIns="0" rIns="0" bIns="0" rtlCol="0" anchor="t">
+          <a:bodyPr vert="horz" wrap="square" lIns="0" tIns="0" rIns="0" bIns="56972" rtlCol="0" anchor="b">
             <a:noAutofit/>
           </a:bodyPr>
           <a:lstStyle>
@@ -1527,7 +1527,7 @@
           <a:noFill/>
         </p:spPr>
         <p:txBody>
-          <a:bodyPr vert="horz" wrap="square" lIns="0" tIns="0" rIns="0" bIns="0" rtlCol="0" anchor="t">
+          <a:bodyPr vert="horz" wrap="square" lIns="0" tIns="0" rIns="0" bIns="56972" rtlCol="0" anchor="b">
             <a:noAutofit/>
           </a:bodyPr>
           <a:lstStyle>
@@ -1889,7 +1889,7 @@
           <a:noFill/>
         </p:spPr>
         <p:txBody>
-          <a:bodyPr vert="horz" wrap="square" lIns="0" tIns="0" rIns="0" bIns="0" rtlCol="0" anchor="t">
+          <a:bodyPr vert="horz" wrap="square" lIns="0" tIns="0" rIns="0" bIns="78336" rtlCol="0" anchor="b">
             <a:noAutofit/>
           </a:bodyPr>
           <a:lstStyle>

--- a/fixtures/rules/pack-voice-field.pptx
+++ b/fixtures/rules/pack-voice-field.pptx
@@ -847,7 +847,7 @@
           <a:noFill/>
         </p:spPr>
         <p:txBody>
-          <a:bodyPr vert="horz" wrap="square" lIns="0" tIns="0" rIns="0" bIns="78336" rtlCol="0" anchor="b">
+          <a:bodyPr vert="horz" wrap="square" lIns="0" tIns="0" rIns="0" bIns="88568" rtlCol="0" anchor="b">
             <a:noAutofit/>
           </a:bodyPr>
           <a:lstStyle>
@@ -1346,7 +1346,7 @@
           <a:noFill/>
         </p:spPr>
         <p:txBody>
-          <a:bodyPr vert="horz" wrap="square" lIns="0" tIns="0" rIns="0" bIns="56972" rtlCol="0" anchor="b">
+          <a:bodyPr vert="horz" wrap="square" lIns="0" tIns="0" rIns="0" bIns="64413" rtlCol="0" anchor="b">
             <a:noAutofit/>
           </a:bodyPr>
           <a:lstStyle>
@@ -1527,7 +1527,7 @@
           <a:noFill/>
         </p:spPr>
         <p:txBody>
-          <a:bodyPr vert="horz" wrap="square" lIns="0" tIns="0" rIns="0" bIns="56972" rtlCol="0" anchor="b">
+          <a:bodyPr vert="horz" wrap="square" lIns="0" tIns="0" rIns="0" bIns="64413" rtlCol="0" anchor="b">
             <a:noAutofit/>
           </a:bodyPr>
           <a:lstStyle>
@@ -1889,7 +1889,7 @@
           <a:noFill/>
         </p:spPr>
         <p:txBody>
-          <a:bodyPr vert="horz" wrap="square" lIns="0" tIns="0" rIns="0" bIns="78336" rtlCol="0" anchor="b">
+          <a:bodyPr vert="horz" wrap="square" lIns="0" tIns="0" rIns="0" bIns="88568" rtlCol="0" anchor="b">
             <a:noAutofit/>
           </a:bodyPr>
           <a:lstStyle>

--- a/fixtures/rules/pack-voice-field.pptx
+++ b/fixtures/rules/pack-voice-field.pptx
@@ -29,6 +29,7 @@
           <a:srgbClr val="16251D"/>
         </a:solidFill>
         <a:latin typeface="+mn-lt"/>
+        <a:cs typeface="+mn-cs"/>
       </a:defRPr>
     </a:lvl1pPr>
     <a:lvl2pPr marL="0" indent="0" algn="l">
@@ -47,6 +48,7 @@
           <a:srgbClr val="16251D"/>
         </a:solidFill>
         <a:latin typeface="+mn-lt"/>
+        <a:cs typeface="+mn-cs"/>
       </a:defRPr>
     </a:lvl2pPr>
     <a:lvl3pPr marL="0" indent="0" algn="l">
@@ -65,6 +67,7 @@
           <a:srgbClr val="16251D"/>
         </a:solidFill>
         <a:latin typeface="+mn-lt"/>
+        <a:cs typeface="+mn-cs"/>
       </a:defRPr>
     </a:lvl3pPr>
     <a:lvl4pPr marL="0" indent="0" algn="l">
@@ -83,6 +86,7 @@
           <a:srgbClr val="16251D"/>
         </a:solidFill>
         <a:latin typeface="+mn-lt"/>
+        <a:cs typeface="+mn-cs"/>
       </a:defRPr>
     </a:lvl4pPr>
     <a:lvl5pPr marL="0" indent="0" algn="l">
@@ -101,6 +105,7 @@
           <a:srgbClr val="16251D"/>
         </a:solidFill>
         <a:latin typeface="+mn-lt"/>
+        <a:cs typeface="+mn-cs"/>
       </a:defRPr>
     </a:lvl5pPr>
     <a:lvl6pPr marL="0" indent="0" algn="l">
@@ -119,6 +124,7 @@
           <a:srgbClr val="16251D"/>
         </a:solidFill>
         <a:latin typeface="+mn-lt"/>
+        <a:cs typeface="+mn-cs"/>
       </a:defRPr>
     </a:lvl6pPr>
     <a:lvl7pPr marL="0" indent="0" algn="l">
@@ -137,6 +143,7 @@
           <a:srgbClr val="16251D"/>
         </a:solidFill>
         <a:latin typeface="+mn-lt"/>
+        <a:cs typeface="+mn-cs"/>
       </a:defRPr>
     </a:lvl7pPr>
     <a:lvl8pPr marL="0" indent="0" algn="l">
@@ -155,6 +162,7 @@
           <a:srgbClr val="16251D"/>
         </a:solidFill>
         <a:latin typeface="+mn-lt"/>
+        <a:cs typeface="+mn-cs"/>
       </a:defRPr>
     </a:lvl8pPr>
     <a:lvl9pPr marL="0" indent="0" algn="l">
@@ -173,6 +181,7 @@
           <a:srgbClr val="16251D"/>
         </a:solidFill>
         <a:latin typeface="+mn-lt"/>
+        <a:cs typeface="+mn-cs"/>
       </a:defRPr>
     </a:lvl9pPr>
   </p:defaultTextStyle>
@@ -867,6 +876,7 @@
                   <a:srgbClr val="16251D"/>
                 </a:solidFill>
                 <a:latin typeface="+mj-lt"/>
+                <a:cs typeface="+mj-cs"/>
               </a:defRPr>
             </a:lvl1pPr>
           </a:lstStyle>
@@ -919,6 +929,7 @@
                   <a:srgbClr val="16251D"/>
                 </a:solidFill>
                 <a:latin typeface="+mn-lt"/>
+                <a:cs typeface="+mn-cs"/>
               </a:defRPr>
             </a:lvl1pPr>
           </a:lstStyle>
@@ -971,6 +982,7 @@
                   <a:srgbClr val="4A5A51"/>
                 </a:solidFill>
                 <a:latin typeface="+mn-lt"/>
+                <a:cs typeface="+mn-cs"/>
               </a:defRPr>
             </a:lvl1pPr>
           </a:lstStyle>
@@ -1056,6 +1068,7 @@
                   <a:srgbClr val="EEF2EE"/>
                 </a:solidFill>
                 <a:latin typeface="+mj-lt"/>
+                <a:cs typeface="+mj-cs"/>
               </a:defRPr>
             </a:lvl1pPr>
           </a:lstStyle>
@@ -1108,6 +1121,7 @@
                   <a:srgbClr val="8DB2FF"/>
                 </a:solidFill>
                 <a:latin typeface="+mn-lt"/>
+                <a:cs typeface="+mn-cs"/>
               </a:defRPr>
             </a:lvl1pPr>
           </a:lstStyle>
@@ -1185,6 +1199,7 @@
                   <a:srgbClr val="16251D"/>
                 </a:solidFill>
                 <a:latin typeface="+mj-lt"/>
+                <a:cs typeface="+mj-cs"/>
               </a:defRPr>
             </a:lvl1pPr>
           </a:lstStyle>
@@ -1237,6 +1252,7 @@
                   <a:srgbClr val="16251D"/>
                 </a:solidFill>
                 <a:latin typeface="+mn-lt"/>
+                <a:cs typeface="+mn-cs"/>
               </a:defRPr>
             </a:lvl1pPr>
           </a:lstStyle>
@@ -1289,6 +1305,7 @@
                   <a:srgbClr val="4A5A51"/>
                 </a:solidFill>
                 <a:latin typeface="+mn-lt"/>
+                <a:cs typeface="+mn-cs"/>
               </a:defRPr>
             </a:lvl1pPr>
           </a:lstStyle>
@@ -1366,6 +1383,7 @@
                   <a:srgbClr val="16251D"/>
                 </a:solidFill>
                 <a:latin typeface="+mj-lt"/>
+                <a:cs typeface="+mj-cs"/>
               </a:defRPr>
             </a:lvl1pPr>
           </a:lstStyle>
@@ -1418,6 +1436,7 @@
                   <a:srgbClr val="16251D"/>
                 </a:solidFill>
                 <a:latin typeface="+mn-lt"/>
+                <a:cs typeface="+mn-cs"/>
               </a:defRPr>
             </a:lvl1pPr>
           </a:lstStyle>
@@ -1470,6 +1489,7 @@
                   <a:srgbClr val="4A5A51"/>
                 </a:solidFill>
                 <a:latin typeface="+mn-lt"/>
+                <a:cs typeface="+mn-cs"/>
               </a:defRPr>
             </a:lvl1pPr>
           </a:lstStyle>
@@ -1547,6 +1567,7 @@
                   <a:srgbClr val="16251D"/>
                 </a:solidFill>
                 <a:latin typeface="+mj-lt"/>
+                <a:cs typeface="+mj-cs"/>
               </a:defRPr>
             </a:lvl1pPr>
           </a:lstStyle>
@@ -1599,6 +1620,7 @@
                   <a:srgbClr val="16251D"/>
                 </a:solidFill>
                 <a:latin typeface="+mn-lt"/>
+                <a:cs typeface="+mn-cs"/>
               </a:defRPr>
             </a:lvl1pPr>
           </a:lstStyle>
@@ -1651,6 +1673,7 @@
                   <a:srgbClr val="16251D"/>
                 </a:solidFill>
                 <a:latin typeface="+mn-lt"/>
+                <a:cs typeface="+mn-cs"/>
               </a:defRPr>
             </a:lvl1pPr>
           </a:lstStyle>
@@ -1703,6 +1726,7 @@
                   <a:srgbClr val="4A5A51"/>
                 </a:solidFill>
                 <a:latin typeface="+mn-lt"/>
+                <a:cs typeface="+mn-cs"/>
               </a:defRPr>
             </a:lvl1pPr>
           </a:lstStyle>
@@ -1780,6 +1804,7 @@
                   <a:srgbClr val="16251D"/>
                 </a:solidFill>
                 <a:latin typeface="+mj-lt"/>
+                <a:cs typeface="+mj-cs"/>
               </a:defRPr>
             </a:lvl1pPr>
           </a:lstStyle>
@@ -1832,6 +1857,7 @@
                   <a:srgbClr val="4A5A51"/>
                 </a:solidFill>
                 <a:latin typeface="+mn-lt"/>
+                <a:cs typeface="+mn-cs"/>
               </a:defRPr>
             </a:lvl1pPr>
           </a:lstStyle>
@@ -1909,6 +1935,7 @@
                   <a:srgbClr val="16251D"/>
                 </a:solidFill>
                 <a:latin typeface="+mj-lt"/>
+                <a:cs typeface="+mj-cs"/>
               </a:defRPr>
             </a:lvl1pPr>
           </a:lstStyle>
@@ -1961,6 +1988,7 @@
                   <a:srgbClr val="16251D"/>
                 </a:solidFill>
                 <a:latin typeface="+mn-lt"/>
+                <a:cs typeface="+mn-cs"/>
               </a:defRPr>
             </a:lvl1pPr>
           </a:lstStyle>
@@ -2013,6 +2041,7 @@
                   <a:srgbClr val="4A5A51"/>
                 </a:solidFill>
                 <a:latin typeface="+mn-lt"/>
+                <a:cs typeface="+mn-cs"/>
               </a:defRPr>
             </a:lvl1pPr>
           </a:lstStyle>
@@ -2098,6 +2127,7 @@
                   <a:srgbClr val="16251D"/>
                 </a:solidFill>
                 <a:latin typeface="+mj-lt"/>
+                <a:cs typeface="+mj-cs"/>
               </a:defRPr>
             </a:lvl1pPr>
           </a:lstStyle>
@@ -2150,6 +2180,7 @@
                   <a:srgbClr val="16251D"/>
                 </a:solidFill>
                 <a:latin typeface="+mn-lt"/>
+                <a:cs typeface="+mn-cs"/>
               </a:defRPr>
             </a:lvl1pPr>
           </a:lstStyle>
@@ -2191,6 +2222,7 @@
             <a:srgbClr val="16251D"/>
           </a:solidFill>
           <a:latin typeface="+mj-lt"/>
+          <a:cs typeface="+mj-cs"/>
         </a:defRPr>
       </a:lvl1pPr>
       <a:lvl2pPr marL="0" indent="0" algn="l">
@@ -2209,6 +2241,7 @@
             <a:srgbClr val="16251D"/>
           </a:solidFill>
           <a:latin typeface="+mj-lt"/>
+          <a:cs typeface="+mj-cs"/>
         </a:defRPr>
       </a:lvl2pPr>
       <a:lvl3pPr marL="0" indent="0" algn="l">
@@ -2227,6 +2260,7 @@
             <a:srgbClr val="16251D"/>
           </a:solidFill>
           <a:latin typeface="+mj-lt"/>
+          <a:cs typeface="+mj-cs"/>
         </a:defRPr>
       </a:lvl3pPr>
       <a:lvl4pPr marL="0" indent="0" algn="l">
@@ -2245,6 +2279,7 @@
             <a:srgbClr val="16251D"/>
           </a:solidFill>
           <a:latin typeface="+mj-lt"/>
+          <a:cs typeface="+mj-cs"/>
         </a:defRPr>
       </a:lvl4pPr>
       <a:lvl5pPr marL="0" indent="0" algn="l">
@@ -2263,6 +2298,7 @@
             <a:srgbClr val="16251D"/>
           </a:solidFill>
           <a:latin typeface="+mj-lt"/>
+          <a:cs typeface="+mj-cs"/>
         </a:defRPr>
       </a:lvl5pPr>
       <a:lvl6pPr marL="0" indent="0" algn="l">
@@ -2281,6 +2317,7 @@
             <a:srgbClr val="16251D"/>
           </a:solidFill>
           <a:latin typeface="+mj-lt"/>
+          <a:cs typeface="+mj-cs"/>
         </a:defRPr>
       </a:lvl6pPr>
       <a:lvl7pPr marL="0" indent="0" algn="l">
@@ -2299,6 +2336,7 @@
             <a:srgbClr val="16251D"/>
           </a:solidFill>
           <a:latin typeface="+mj-lt"/>
+          <a:cs typeface="+mj-cs"/>
         </a:defRPr>
       </a:lvl7pPr>
       <a:lvl8pPr marL="0" indent="0" algn="l">
@@ -2317,6 +2355,7 @@
             <a:srgbClr val="16251D"/>
           </a:solidFill>
           <a:latin typeface="+mj-lt"/>
+          <a:cs typeface="+mj-cs"/>
         </a:defRPr>
       </a:lvl8pPr>
       <a:lvl9pPr marL="0" indent="0" algn="l">
@@ -2335,6 +2374,7 @@
             <a:srgbClr val="16251D"/>
           </a:solidFill>
           <a:latin typeface="+mj-lt"/>
+          <a:cs typeface="+mj-cs"/>
         </a:defRPr>
       </a:lvl9pPr>
     </p:titleStyle>
@@ -2355,6 +2395,7 @@
             <a:srgbClr val="16251D"/>
           </a:solidFill>
           <a:latin typeface="+mn-lt"/>
+          <a:cs typeface="+mn-cs"/>
         </a:defRPr>
       </a:lvl1pPr>
       <a:lvl2pPr marL="0" indent="0" algn="l">
@@ -2373,6 +2414,7 @@
             <a:srgbClr val="16251D"/>
           </a:solidFill>
           <a:latin typeface="+mn-lt"/>
+          <a:cs typeface="+mn-cs"/>
         </a:defRPr>
       </a:lvl2pPr>
       <a:lvl3pPr marL="0" indent="0" algn="l">
@@ -2391,6 +2433,7 @@
             <a:srgbClr val="16251D"/>
           </a:solidFill>
           <a:latin typeface="+mn-lt"/>
+          <a:cs typeface="+mn-cs"/>
         </a:defRPr>
       </a:lvl3pPr>
       <a:lvl4pPr marL="0" indent="0" algn="l">
@@ -2409,6 +2452,7 @@
             <a:srgbClr val="16251D"/>
           </a:solidFill>
           <a:latin typeface="+mn-lt"/>
+          <a:cs typeface="+mn-cs"/>
         </a:defRPr>
       </a:lvl4pPr>
       <a:lvl5pPr marL="0" indent="0" algn="l">
@@ -2427,6 +2471,7 @@
             <a:srgbClr val="16251D"/>
           </a:solidFill>
           <a:latin typeface="+mn-lt"/>
+          <a:cs typeface="+mn-cs"/>
         </a:defRPr>
       </a:lvl5pPr>
       <a:lvl6pPr marL="0" indent="0" algn="l">
@@ -2445,6 +2490,7 @@
             <a:srgbClr val="16251D"/>
           </a:solidFill>
           <a:latin typeface="+mn-lt"/>
+          <a:cs typeface="+mn-cs"/>
         </a:defRPr>
       </a:lvl6pPr>
       <a:lvl7pPr marL="0" indent="0" algn="l">
@@ -2463,6 +2509,7 @@
             <a:srgbClr val="16251D"/>
           </a:solidFill>
           <a:latin typeface="+mn-lt"/>
+          <a:cs typeface="+mn-cs"/>
         </a:defRPr>
       </a:lvl7pPr>
       <a:lvl8pPr marL="0" indent="0" algn="l">
@@ -2481,6 +2528,7 @@
             <a:srgbClr val="16251D"/>
           </a:solidFill>
           <a:latin typeface="+mn-lt"/>
+          <a:cs typeface="+mn-cs"/>
         </a:defRPr>
       </a:lvl8pPr>
       <a:lvl9pPr marL="0" indent="0" algn="l">
@@ -2499,6 +2547,7 @@
             <a:srgbClr val="16251D"/>
           </a:solidFill>
           <a:latin typeface="+mn-lt"/>
+          <a:cs typeface="+mn-cs"/>
         </a:defRPr>
       </a:lvl9pPr>
     </p:bodyStyle>
@@ -2519,6 +2568,7 @@
             <a:srgbClr val="16251D"/>
           </a:solidFill>
           <a:latin typeface="+mn-lt"/>
+          <a:cs typeface="+mn-cs"/>
         </a:defRPr>
       </a:lvl1pPr>
       <a:lvl2pPr marL="0" indent="0" algn="l">
@@ -2537,6 +2587,7 @@
             <a:srgbClr val="16251D"/>
           </a:solidFill>
           <a:latin typeface="+mn-lt"/>
+          <a:cs typeface="+mn-cs"/>
         </a:defRPr>
       </a:lvl2pPr>
       <a:lvl3pPr marL="0" indent="0" algn="l">
@@ -2555,6 +2606,7 @@
             <a:srgbClr val="16251D"/>
           </a:solidFill>
           <a:latin typeface="+mn-lt"/>
+          <a:cs typeface="+mn-cs"/>
         </a:defRPr>
       </a:lvl3pPr>
       <a:lvl4pPr marL="0" indent="0" algn="l">
@@ -2573,6 +2625,7 @@
             <a:srgbClr val="16251D"/>
           </a:solidFill>
           <a:latin typeface="+mn-lt"/>
+          <a:cs typeface="+mn-cs"/>
         </a:defRPr>
       </a:lvl4pPr>
       <a:lvl5pPr marL="0" indent="0" algn="l">
@@ -2591,6 +2644,7 @@
             <a:srgbClr val="16251D"/>
           </a:solidFill>
           <a:latin typeface="+mn-lt"/>
+          <a:cs typeface="+mn-cs"/>
         </a:defRPr>
       </a:lvl5pPr>
       <a:lvl6pPr marL="0" indent="0" algn="l">
@@ -2609,6 +2663,7 @@
             <a:srgbClr val="16251D"/>
           </a:solidFill>
           <a:latin typeface="+mn-lt"/>
+          <a:cs typeface="+mn-cs"/>
         </a:defRPr>
       </a:lvl6pPr>
       <a:lvl7pPr marL="0" indent="0" algn="l">
@@ -2627,6 +2682,7 @@
             <a:srgbClr val="16251D"/>
           </a:solidFill>
           <a:latin typeface="+mn-lt"/>
+          <a:cs typeface="+mn-cs"/>
         </a:defRPr>
       </a:lvl7pPr>
       <a:lvl8pPr marL="0" indent="0" algn="l">
@@ -2645,6 +2701,7 @@
             <a:srgbClr val="16251D"/>
           </a:solidFill>
           <a:latin typeface="+mn-lt"/>
+          <a:cs typeface="+mn-cs"/>
         </a:defRPr>
       </a:lvl8pPr>
       <a:lvl9pPr marL="0" indent="0" algn="l">
@@ -2663,6 +2720,7 @@
             <a:srgbClr val="16251D"/>
           </a:solidFill>
           <a:latin typeface="+mn-lt"/>
+          <a:cs typeface="+mn-cs"/>
         </a:defRPr>
       </a:lvl9pPr>
     </p:otherStyle>
@@ -3130,12 +3188,12 @@
       <a:majorFont>
         <a:latin typeface="Georgia"/>
         <a:ea typeface=""/>
-        <a:cs typeface=""/>
+        <a:cs typeface="Georgia"/>
       </a:majorFont>
       <a:minorFont>
         <a:latin typeface="Georgia"/>
         <a:ea typeface=""/>
-        <a:cs typeface=""/>
+        <a:cs typeface="Georgia"/>
       </a:minorFont>
     </a:fontScheme>
     <a:fmtScheme name="swiss">
